--- a/assets/connpass-eyecatch/P027_eyecatch_temp.pptx
+++ b/assets/connpass-eyecatch/P027_eyecatch_temp.pptx
@@ -8709,7 +8709,29 @@
                 <a:ea typeface="Noto Sans JP" pitchFamily="34" charset="-122"/>
                 <a:cs typeface="Noto Sans JP" pitchFamily="34" charset="-120"/>
               </a:rPr>
-              <a:t>Power Automate 入門講座</a:t>
+              <a:t>Power Automate × </a:t>
+            </a:r>
+            <a:r>
+              <a:rPr lang="en-US" sz="4400" b="1" kern="0" spc="30" dirty="0">
+                <a:solidFill>
+                  <a:srgbClr val="7C3AED"/>
+                </a:solidFill>
+                <a:latin typeface="Noto Sans JP" pitchFamily="34" charset="0"/>
+                <a:ea typeface="Noto Sans JP" pitchFamily="34" charset="-122"/>
+                <a:cs typeface="Noto Sans JP" pitchFamily="34" charset="-120"/>
+              </a:rPr>
+              <a:t>Copilot</a:t>
+            </a:r>
+            <a:r>
+              <a:rPr lang="en-US" sz="4400" b="1" kern="0" spc="30" dirty="0">
+                <a:solidFill>
+                  <a:srgbClr val="1E40AF"/>
+                </a:solidFill>
+                <a:latin typeface="Noto Sans JP" pitchFamily="34" charset="0"/>
+                <a:ea typeface="Noto Sans JP" pitchFamily="34" charset="-122"/>
+                <a:cs typeface="Noto Sans JP" pitchFamily="34" charset="-120"/>
+              </a:rPr>
+              <a:t/>
             </a:r>
             <a:endParaRPr lang="en-US" sz="4400" dirty="0"/>
           </a:p>
@@ -8835,7 +8857,7 @@
                 <a:ea typeface="Noto Sans JP" pitchFamily="34" charset="-122"/>
                 <a:cs typeface="Noto Sans JP" pitchFamily="34" charset="-120"/>
               </a:rPr>
-              <a:t>PA45　【AIと作る編】</a:t>
+              <a:t>PA45　【Copilot活用編】</a:t>
             </a:r>
             <a:r>
               <a:rPr lang="ja-JP" altLang="en-US" sz="3200" b="1" kern="0" spc="-112">
@@ -8918,7 +8940,29 @@
                 <a:ea typeface="Noto Sans JP" pitchFamily="34" charset="-122"/>
                 <a:cs typeface="Noto Sans JP" pitchFamily="34" charset="-120"/>
               </a:rPr>
-              <a:t>第27回：Copilotに作らせる</a:t>
+              <a:t>第27回：</a:t>
+            </a:r>
+            <a:r>
+              <a:rPr lang="en-US" sz="4500" b="1" dirty="0">
+                <a:solidFill>
+                  <a:srgbClr val="7C3AED"/>
+                </a:solidFill>
+                <a:latin typeface="Noto Sans JP" pitchFamily="34" charset="0"/>
+                <a:ea typeface="Noto Sans JP" pitchFamily="34" charset="-122"/>
+                <a:cs typeface="Noto Sans JP" pitchFamily="34" charset="-120"/>
+              </a:rPr>
+              <a:t>Copilot</a:t>
+            </a:r>
+            <a:r>
+              <a:rPr lang="en-US" sz="4500" b="1" dirty="0">
+                <a:solidFill>
+                  <a:srgbClr val="1F2937"/>
+                </a:solidFill>
+                <a:latin typeface="Noto Sans JP" pitchFamily="34" charset="0"/>
+                <a:ea typeface="Noto Sans JP" pitchFamily="34" charset="-122"/>
+                <a:cs typeface="Noto Sans JP" pitchFamily="34" charset="-120"/>
+              </a:rPr>
+              <a:t>の頼み方5選</a:t>
             </a:r>
             <a:r>
               <a:rPr lang="en-US" sz="4500" b="1">
@@ -8945,7 +8989,7 @@
                 <a:ea typeface="Noto Sans JP" pitchFamily="34" charset="-122"/>
                 <a:cs typeface="Noto Sans JP" pitchFamily="34" charset="-120"/>
               </a:rPr>
-              <a:t>AIの手順どおりに組む</a:t>
+              <a:t>頼み方を変えるだけで</a:t>
             </a:r>
           </a:p>
           <a:p>
@@ -8961,7 +9005,7 @@
                 <a:ea typeface="Noto Sans JP" pitchFamily="34" charset="-122"/>
                 <a:cs typeface="Noto Sans JP" pitchFamily="34" charset="-120"/>
               </a:rPr>
-              <a:t>引っかかる所を自分で直す</a:t>
+              <a:t>返ってくる答えが変わる</a:t>
             </a:r>
             <a:endParaRPr lang="en-US" sz="4500" dirty="0"/>
           </a:p>
@@ -9034,7 +9078,7 @@
                 <a:ea typeface="Noto Sans JP" pitchFamily="34" charset="-122"/>
                 <a:cs typeface="Noto Sans JP" pitchFamily="34" charset="-120"/>
               </a:rPr>
-              <a:t>Theme　Copilotに手順を聞いて組み、読み替えと空欄を自分で直す</a:t>
+              <a:t>Theme　フロー作りが速くなるCopilotの頼み方5つ＋貼れるプロンプト</a:t>
             </a:r>
             <a:r>
               <a:rPr lang="ja-JP" altLang="en-US" sz="1600" b="1">
@@ -9095,7 +9139,7 @@
                 <a:ea typeface="Noto Sans JP" pitchFamily="34" charset="-122"/>
                 <a:cs typeface="Noto Sans JP" pitchFamily="34" charset="-120"/>
               </a:rPr>
-              <a:t>Target　非IT・フローを一から組むのが不安な方・初参加の方</a:t>
+              <a:t>Target　非IT・Copilotをうまく使えていない方・初参加の方</a:t>
             </a:r>
             <a:r>
               <a:rPr lang="ja-JP" altLang="en-US" sz="1600" b="1">
